--- a/ekim-cedes-pano.pptx
+++ b/ekim-cedes-pano.pptx
@@ -1252,6 +1252,10 @@
           </a:solidFill>
           <a:ln/>
         </p:spPr>
+        <p:txBody>
+          <a:bodyPr/>
+          <a:p/>
+        </p:txBody>
       </p:sp>
       <p:sp>
         <p:nvSpPr>
@@ -1274,6 +1278,10 @@
           </a:solidFill>
           <a:ln/>
         </p:spPr>
+        <p:txBody>
+          <a:bodyPr/>
+          <a:p/>
+        </p:txBody>
       </p:sp>
       <p:sp>
         <p:nvSpPr>
@@ -1347,7 +1355,7 @@
                 <a:ea typeface="Calibri" pitchFamily="34" charset="-122"/>
                 <a:cs typeface="Calibri" pitchFamily="34" charset="-120"/>
               </a:rPr>
-              <a:t>EKIM AYI  •  SAYGI • ESTETİK • MÜTEVAZILIK</a:t>
+              <a:t>EKİM AYI  •  SAYGI • TEMİZLİK • MAHREMİYET</a:t>
             </a:r>
             <a:endParaRPr lang="en-US" sz="2000" dirty="0"/>
           </a:p>
@@ -1383,7 +1391,7 @@
                   <a:srgbClr val="FFFFFF"/>
                 </a:solidFill>
               </a:rPr>
-              <a:t>2025 - 2026 Eğitim Öğretim Yılı</a:t>
+              <a:t>2026 - 2027 Eğitim Öğretim Yılı</a:t>
             </a:r>
             <a:endParaRPr lang="en-US" sz="1600" dirty="0"/>
           </a:p>
@@ -1440,6 +1448,10 @@
           </a:solidFill>
           <a:ln/>
         </p:spPr>
+        <p:txBody>
+          <a:bodyPr/>
+          <a:p/>
+        </p:txBody>
       </p:sp>
       <p:sp>
         <p:nvSpPr>
@@ -1575,6 +1587,10 @@
           </a:solidFill>
           <a:ln/>
         </p:spPr>
+        <p:txBody>
+          <a:bodyPr/>
+          <a:p/>
+        </p:txBody>
       </p:sp>
       <p:sp>
         <p:nvSpPr>
@@ -1620,7 +1636,7 @@
                   <a:srgbClr val="2B2B2B"/>
                 </a:solidFill>
               </a:rPr>
-              <a:t>29 Eyl - 03 Ekim</a:t>
+              <a:t>28 Eylül – 2 Ekim</a:t>
             </a:r>
             <a:endParaRPr lang="en-US" sz="1600" dirty="0"/>
           </a:p>
@@ -1806,10 +1822,14 @@
             <a:avLst/>
           </a:prstGeom>
           <a:solidFill>
-            <a:srgbClr val="F96167"/>
+            <a:srgbClr val="6D2E46"/>
           </a:solidFill>
           <a:ln/>
         </p:spPr>
+        <p:txBody>
+          <a:bodyPr/>
+          <a:p/>
+        </p:txBody>
       </p:sp>
       <p:sp>
         <p:nvSpPr>
@@ -1841,7 +1861,7 @@
                   <a:srgbClr val="000000"/>
                 </a:solidFill>
               </a:rPr>
-              <a:t>🎨</a:t>
+              <a:t>🧼</a:t>
             </a:r>
             <a:endParaRPr lang="en-US" sz="8000" dirty="0"/>
           </a:p>
@@ -1880,7 +1900,7 @@
                 <a:ea typeface="Cambria" pitchFamily="34" charset="-122"/>
                 <a:cs typeface="Cambria" pitchFamily="34" charset="-120"/>
               </a:rPr>
-              <a:t>ESTETİK</a:t>
+              <a:t>TEMİZLİK</a:t>
             </a:r>
             <a:endParaRPr lang="en-US" sz="2600" dirty="0"/>
           </a:p>
@@ -1916,7 +1936,7 @@
                   <a:srgbClr val="FFFFFF"/>
                 </a:solidFill>
               </a:rPr>
-              <a:t>Güzeli Görmek ve Yaratmak</a:t>
+              <a:t>Kişisel ve Çevresel Temizlik</a:t>
             </a:r>
             <a:endParaRPr lang="en-US" sz="1500" dirty="0"/>
           </a:p>
@@ -1945,6 +1965,10 @@
           </a:solidFill>
           <a:ln/>
         </p:spPr>
+        <p:txBody>
+          <a:bodyPr/>
+          <a:p/>
+        </p:txBody>
       </p:sp>
       <p:sp>
         <p:nvSpPr>
@@ -1976,7 +2000,7 @@
                   <a:srgbClr val="2B2B2B"/>
                 </a:solidFill>
               </a:rPr>
-              <a:t>2. HAFTA</a:t>
+              <a:t>2 ve 3. HAFTA</a:t>
             </a:r>
             <a:endParaRPr lang="en-US" sz="1600" dirty="0"/>
           </a:p>
@@ -1990,7 +2014,7 @@
                   <a:srgbClr val="2B2B2B"/>
                 </a:solidFill>
               </a:rPr>
-              <a:t>06 - 10 Ekim</a:t>
+              <a:t>5 – 16 Ekim</a:t>
             </a:r>
             <a:endParaRPr lang="en-US" sz="1600" dirty="0"/>
           </a:p>
@@ -2023,13 +2047,13 @@
             <a:r>
               <a:rPr lang="en-US" sz="2200" b="1" i="1" dirty="0">
                 <a:solidFill>
-                  <a:srgbClr val="2F3C7E"/>
+                  <a:srgbClr val="36454F"/>
                 </a:solidFill>
                 <a:latin typeface="Cambria" pitchFamily="34" charset="0"/>
                 <a:ea typeface="Cambria" pitchFamily="34" charset="-122"/>
                 <a:cs typeface="Cambria" pitchFamily="34" charset="-120"/>
               </a:rPr>
-              <a:t>"Güzeli görmek, güzeli yaratmanın ilk adımıdır."</a:t>
+              <a:t>"Temizlik, kendimize ve çevremize gösterdiğimiz saygıdır."</a:t>
             </a:r>
             <a:endParaRPr lang="en-US" sz="2200" dirty="0"/>
           </a:p>
@@ -2069,7 +2093,7 @@
                   <a:srgbClr val="2B2B2B"/>
                 </a:solidFill>
               </a:rPr>
-              <a:t>Etrafımızdaki güzellikleri fark etmeye çalışırız.</a:t>
+              <a:t>Ellerimizi düzenli yıkarız.</a:t>
             </a:r>
             <a:endParaRPr lang="en-US" sz="1700" dirty="0"/>
           </a:p>
@@ -2087,7 +2111,7 @@
                   <a:srgbClr val="2B2B2B"/>
                 </a:solidFill>
               </a:rPr>
-              <a:t>Küçük bir emekle sıradan eşyalar özel olabilir.</a:t>
+              <a:t>Kullandığımız alanı temiz bırakırız.</a:t>
             </a:r>
             <a:endParaRPr lang="en-US" sz="1700" dirty="0"/>
           </a:p>
@@ -2105,7 +2129,7 @@
                   <a:srgbClr val="2B2B2B"/>
                 </a:solidFill>
               </a:rPr>
-              <a:t>Temiz ve düzenli bir ortam da estetiğin parçasıdır.</a:t>
+              <a:t>Çöpümüzü çöp kutusuna atarız.</a:t>
             </a:r>
             <a:endParaRPr lang="en-US" sz="1700" dirty="0"/>
           </a:p>
@@ -2123,7 +2147,7 @@
                   <a:srgbClr val="2B2B2B"/>
                 </a:solidFill>
               </a:rPr>
-              <a:t>Sanat, güzeli ifade etmenin bir yoludur.</a:t>
+              <a:t>Temizlik hem sağlık hem saygı demektir.</a:t>
             </a:r>
             <a:endParaRPr lang="en-US" sz="1700" dirty="0"/>
           </a:p>
@@ -2139,7 +2163,7 @@
 
 <file path=ppt/slides/slide4.xml><?xml version="1.0" encoding="utf-8"?>
 <p:sld xmlns:a="http://schemas.openxmlformats.org/drawingml/2006/main" xmlns:r="http://schemas.openxmlformats.org/officeDocument/2006/relationships" xmlns:p="http://schemas.openxmlformats.org/presentationml/2006/main">
-  <p:cSld name="Slide 4">
+  <p:cSld name="Slide 3">
     <p:bg>
       <p:bgPr>
         <a:solidFill>
@@ -2176,10 +2200,14 @@
             <a:avLst/>
           </a:prstGeom>
           <a:solidFill>
-            <a:srgbClr val="F96167"/>
+            <a:srgbClr val="84B59F"/>
           </a:solidFill>
           <a:ln/>
         </p:spPr>
+        <p:txBody>
+          <a:bodyPr/>
+          <a:p/>
+        </p:txBody>
       </p:sp>
       <p:sp>
         <p:nvSpPr>
@@ -2211,7 +2239,7 @@
                   <a:srgbClr val="000000"/>
                 </a:solidFill>
               </a:rPr>
-              <a:t>🌾</a:t>
+              <a:t>🔒</a:t>
             </a:r>
             <a:endParaRPr lang="en-US" sz="8000" dirty="0"/>
           </a:p>
@@ -2250,7 +2278,7 @@
                 <a:ea typeface="Cambria" pitchFamily="34" charset="-122"/>
                 <a:cs typeface="Cambria" pitchFamily="34" charset="-120"/>
               </a:rPr>
-              <a:t>MÜTEVAZILIK</a:t>
+              <a:t>MAHREMİYET</a:t>
             </a:r>
             <a:endParaRPr lang="en-US" sz="2600" dirty="0"/>
           </a:p>
@@ -2286,7 +2314,7 @@
                   <a:srgbClr val="FFFFFF"/>
                 </a:solidFill>
               </a:rPr>
-              <a:t>Övünmeden Paylaşmak</a:t>
+              <a:t>Kendine ve Başkalarına Ait Sınırlar</a:t>
             </a:r>
             <a:endParaRPr lang="en-US" sz="1500" dirty="0"/>
           </a:p>
@@ -2315,6 +2343,10 @@
           </a:solidFill>
           <a:ln/>
         </p:spPr>
+        <p:txBody>
+          <a:bodyPr/>
+          <a:p/>
+        </p:txBody>
       </p:sp>
       <p:sp>
         <p:nvSpPr>
@@ -2346,7 +2378,7 @@
                   <a:srgbClr val="2B2B2B"/>
                 </a:solidFill>
               </a:rPr>
-              <a:t>3. HAFTA</a:t>
+              <a:t>4 ve 5. HAFTA</a:t>
             </a:r>
             <a:endParaRPr lang="en-US" sz="1600" dirty="0"/>
           </a:p>
@@ -2360,7 +2392,7 @@
                   <a:srgbClr val="2B2B2B"/>
                 </a:solidFill>
               </a:rPr>
-              <a:t>13 - 17 Ekim</a:t>
+              <a:t>19 – 30 Ekim</a:t>
             </a:r>
             <a:endParaRPr lang="en-US" sz="1600" dirty="0"/>
           </a:p>
@@ -2393,13 +2425,13 @@
             <a:r>
               <a:rPr lang="en-US" sz="2200" b="1" i="1" dirty="0">
                 <a:solidFill>
-                  <a:srgbClr val="2F3C7E"/>
+                  <a:srgbClr val="50808E"/>
                 </a:solidFill>
                 <a:latin typeface="Cambria" pitchFamily="34" charset="0"/>
                 <a:ea typeface="Cambria" pitchFamily="34" charset="-122"/>
                 <a:cs typeface="Cambria" pitchFamily="34" charset="-120"/>
               </a:rPr>
-              <a:t>"Başarmak güzeldir, bunu alçakgönüllülükle paylaşmak daha güzeldir."</a:t>
+              <a:t>"Herkesin özel alanına saygı göstermek, mahremiyete değer vermektir."</a:t>
             </a:r>
             <a:endParaRPr lang="en-US" sz="2200" dirty="0"/>
           </a:p>
@@ -2439,7 +2471,7 @@
                   <a:srgbClr val="2B2B2B"/>
                 </a:solidFill>
               </a:rPr>
-              <a:t>Başarılarımızıövünmeden paylaşırız.</a:t>
+              <a:t>Başkasının eşyasını izinsiz kullanmayız.</a:t>
             </a:r>
             <a:endParaRPr lang="en-US" sz="1700" dirty="0"/>
           </a:p>
@@ -2457,7 +2489,7 @@
                   <a:srgbClr val="2B2B2B"/>
                 </a:solidFill>
               </a:rPr>
-              <a:t>Başkalarının emeğini de takdir ederiz.</a:t>
+              <a:t>Kapalı kapıyı çalmadan açmayız.</a:t>
             </a:r>
             <a:endParaRPr lang="en-US" sz="1700" dirty="0"/>
           </a:p>
@@ -2475,7 +2507,7 @@
                   <a:srgbClr val="2B2B2B"/>
                 </a:solidFill>
               </a:rPr>
-              <a:t>Mütevazılık, kendimizi küçük görmek değil saygılı olmaktır.</a:t>
+              <a:t>Vücudumuz bize aittir, sınırlarımızı biliriz.</a:t>
             </a:r>
             <a:endParaRPr lang="en-US" sz="1700" dirty="0"/>
           </a:p>
@@ -2493,7 +2525,7 @@
                   <a:srgbClr val="2B2B2B"/>
                 </a:solidFill>
               </a:rPr>
-              <a:t>Herkesin bir değeri olduğunu unutmayız.</a:t>
+              <a:t>Rahatsız eden bir duruma 'hayır' diyebiliriz.</a:t>
             </a:r>
             <a:endParaRPr lang="en-US" sz="1700" dirty="0"/>
           </a:p>
@@ -2600,7 +2632,7 @@
                   <a:srgbClr val="F9E795"/>
                 </a:solidFill>
               </a:rPr>
-              <a:t>SAYGI • ESTETİK • MÜTEVAZILIK</a:t>
+              <a:t>SAYGI • TEMİZLİK • MAHREMİYET</a:t>
             </a:r>
             <a:endParaRPr lang="en-US" sz="2200" dirty="0"/>
           </a:p>
